--- a/decks/hist-renaissance-medicine/hist-renaissance-medicine_ch5_vesalius-harvey.pptx
+++ b/decks/hist-renaissance-medicine/hist-renaissance-medicine_ch5_vesalius-harvey.pptx
@@ -132,31 +132,31 @@
   <p:extLst>
     <p:ext uri="{521415D9-36F7-43E2-AB2F-B90AF26B5E84}">
       <p14:sectionLst xmlns:p14="http://schemas.microsoft.com/office/powerpoint/2010/main">
-        <p14:section name="Opening" id="{56adee8a-32f7-9c89-a97b-aabe3394dd9e}">
+        <p14:section name="Opening" id="{4e020dde-e89d-8b75-9e8e-5237f6d061bb}">
           <p14:sldIdLst>
             <p14:sldId id="256"/>
           </p14:sldIdLst>
         </p14:section>
-        <p14:section name="Gate" id="{0549167e-ac8f-6789-34b7-58a5db3c45e9}">
+        <p14:section name="Gate" id="{3ccbc54e-e763-ef6a-87db-a3a7444e106d}">
           <p14:sldIdLst>
             <p14:sldId id="257"/>
             <p14:sldId id="258"/>
             <p14:sldId id="259"/>
           </p14:sldIdLst>
         </p14:section>
-        <p14:section name="Pre-teach" id="{c5beaefc-93fa-30f4-3240-795c8a8ff62f}">
+        <p14:section name="Pre-teach" id="{8f07c489-5757-2f25-c657-5de62c2ef972}">
           <p14:sldIdLst>
             <p14:sldId id="260"/>
             <p14:sldId id="261"/>
           </p14:sldIdLst>
         </p14:section>
-        <p14:section name="Read-along" id="{8ed02d44-8866-fc24-bdc2-ea7327af0da4}">
+        <p14:section name="Read-along" id="{8c4a0f1d-8601-14c2-c002-220769f02d8d}">
           <p14:sldIdLst>
             <p14:sldId id="262"/>
             <p14:sldId id="263"/>
           </p14:sldIdLst>
         </p14:section>
-        <p14:section name="Teach" id="{fa2500fb-e139-f63c-3fc1-bcd261cac8ed}">
+        <p14:section name="Teach" id="{c012f0de-2c44-4672-9d11-7f0e19a22927}">
           <p14:sldIdLst>
             <p14:sldId id="264"/>
             <p14:sldId id="265"/>
@@ -168,7 +168,7 @@
             <p14:sldId id="271"/>
           </p14:sldIdLst>
         </p14:section>
-        <p14:section name="Routes" id="{b99829d8-4609-9554-b9cb-65f0bee6f920}">
+        <p14:section name="Routes" id="{7e4f10ec-1b63-fa76-a196-e2e18ebec831}">
           <p14:sldIdLst>
             <p14:sldId id="272"/>
             <p14:sldId id="273"/>
@@ -178,12 +178,12 @@
             <p14:sldId id="277"/>
           </p14:sldIdLst>
         </p14:section>
-        <p14:section name="Close" id="{ae85a1ee-c126-2c43-a6f6-35706d31dc87}">
+        <p14:section name="Close" id="{0b7cc81f-e274-530c-e9d4-581cd785f57c}">
           <p14:sldIdLst>
             <p14:sldId id="278"/>
           </p14:sldIdLst>
         </p14:section>
-        <p14:section name="Answers" id="{14afd36d-ec70-e5a9-99cf-f415f305a9fb}">
+        <p14:section name="Answers" id="{af318e2a-fb66-0dac-7fcb-49387ba4985d}">
           <p14:sldIdLst>
             <p14:sldId id="279"/>
             <p14:sldId id="280"/>
